--- a/docs/DaoTao/Buoi09_BatLoiXuLySuCo.pptx
+++ b/docs/DaoTao/Buoi09_BatLoiXuLySuCo.pptx
@@ -1317,7 +1317,7 @@
           </a:p>
           <a:p>
             <a:r>
-              <a:t>status 0 chỉ lưu, 1 đưa vào p00 chờ chuyển, 2 ghi sổ cái ngay.</a:t>
+              <a:t>status 0 chỉ lưu, 1 đưa vào p00 chờ chuyển, 2 ghi sổ cái ngay. Phiếu nhập PND đi cùng khuôn: i74, c74, tồn hiện thời (nhập), Posting$Inventory loại 1 vào r70, fs_PostIRTran vào r00, AfterUpdate$IR; trạng thái PND: 1 nhập kho, 2 chuyển KTTH, 3 ghi sổ cái.</a:t>
             </a:r>
           </a:p>
           <a:p>
